--- a/public/fun/cards/care/care-33.pptx
+++ b/public/fun/cards/care/care-33.pptx
@@ -3085,7 +3085,7 @@
     <p:bg>
       <p:bgPr>
         <a:solidFill>
-          <a:srgbClr val="F3F9F1"/>
+          <a:srgbClr val="FFFFFF"/>
         </a:solidFill>
         <a:effectLst/>
       </p:bgPr>
@@ -3099,20 +3099,22 @@
       <p:grpSpPr/>
       <p:sp>
         <p:nvSpPr>
-          <p:cNvPr id="2" name="Rectangle 1"/>
+          <p:cNvPr id="2" name="Rounded Rectangle 1"/>
           <p:cNvSpPr/>
           <p:nvPr/>
         </p:nvSpPr>
         <p:spPr>
           <a:xfrm>
-            <a:off x="0" y="0"/>
-            <a:ext cx="3240000" cy="720000"/>
+            <a:off x="252000" y="230400"/>
+            <a:ext cx="575852" cy="180000"/>
           </a:xfrm>
-          <a:prstGeom prst="rect">
-            <a:avLst/>
+          <a:prstGeom prst="roundRect">
+            <a:avLst>
+              <a:gd name="adj" fmla="val 50000"/>
+            </a:avLst>
           </a:prstGeom>
           <a:solidFill>
-            <a:srgbClr val="5D9640"/>
+            <a:srgbClr val="FF8FB8"/>
           </a:solidFill>
           <a:ln>
             <a:noFill/>
@@ -3128,107 +3130,14 @@
       </p:sp>
       <p:sp>
         <p:nvSpPr>
-          <p:cNvPr id="3" name="Oval 2"/>
-          <p:cNvSpPr/>
+          <p:cNvPr id="3" name="텍스트"/>
+          <p:cNvSpPr txBox="1"/>
           <p:nvPr/>
         </p:nvSpPr>
         <p:spPr>
           <a:xfrm>
-            <a:off x="2685024" y="201024"/>
-            <a:ext cx="317952" cy="317952"/>
-          </a:xfrm>
-          <a:prstGeom prst="ellipse">
-            <a:avLst/>
-          </a:prstGeom>
-          <a:solidFill>
-            <a:srgbClr val="808080">
-              <a:alpha val="35000"/>
-            </a:srgbClr>
-          </a:solidFill>
-          <a:ln>
-            <a:noFill/>
-          </a:ln>
-        </p:spPr>
-        <p:txBody>
-          <a:bodyPr rtlCol="0" anchor="ctr"/>
-          <a:lstStyle/>
-          <a:p>
-            <a:pPr algn="ctr"/>
-          </a:p>
-        </p:txBody>
-      </p:sp>
-      <p:sp>
-        <p:nvSpPr>
-          <p:cNvPr id="4" name="Rounded Rectangle 3"/>
-          <p:cNvSpPr/>
-          <p:nvPr/>
-        </p:nvSpPr>
-        <p:spPr>
-          <a:xfrm>
-            <a:off x="2799072" y="242496"/>
-            <a:ext cx="89856" cy="235008"/>
-          </a:xfrm>
-          <a:prstGeom prst="roundRect">
-            <a:avLst>
-              <a:gd name="adj" fmla="val 11538"/>
-            </a:avLst>
-          </a:prstGeom>
-          <a:solidFill>
-            <a:srgbClr val="FFFFFF"/>
-          </a:solidFill>
-          <a:ln>
-            <a:noFill/>
-          </a:ln>
-        </p:spPr>
-        <p:txBody>
-          <a:bodyPr rtlCol="0" anchor="ctr"/>
-          <a:lstStyle/>
-          <a:p>
-            <a:pPr algn="ctr"/>
-          </a:p>
-        </p:txBody>
-      </p:sp>
-      <p:sp>
-        <p:nvSpPr>
-          <p:cNvPr id="5" name="Rounded Rectangle 4"/>
-          <p:cNvSpPr/>
-          <p:nvPr/>
-        </p:nvSpPr>
-        <p:spPr>
-          <a:xfrm>
-            <a:off x="2726496" y="315072"/>
-            <a:ext cx="235008" cy="89856"/>
-          </a:xfrm>
-          <a:prstGeom prst="roundRect">
-            <a:avLst>
-              <a:gd name="adj" fmla="val 11538"/>
-            </a:avLst>
-          </a:prstGeom>
-          <a:solidFill>
-            <a:srgbClr val="FFFFFF"/>
-          </a:solidFill>
-          <a:ln>
-            <a:noFill/>
-          </a:ln>
-        </p:spPr>
-        <p:txBody>
-          <a:bodyPr rtlCol="0" anchor="ctr"/>
-          <a:lstStyle/>
-          <a:p>
-            <a:pPr algn="ctr"/>
-          </a:p>
-        </p:txBody>
-      </p:sp>
-      <p:sp>
-        <p:nvSpPr>
-          <p:cNvPr id="6" name="텍스트"/>
-          <p:cNvSpPr txBox="1"/>
-          <p:nvPr/>
-        </p:nvSpPr>
-        <p:spPr>
-          <a:xfrm>
-            <a:off x="230400" y="187200"/>
-            <a:ext cx="2160000" cy="305437"/>
+            <a:off x="252000" y="230400"/>
+            <a:ext cx="575852" cy="180000"/>
           </a:xfrm>
           <a:prstGeom prst="rect">
             <a:avLst/>
@@ -3236,39 +3145,39 @@
           <a:noFill/>
         </p:spPr>
         <p:txBody>
-          <a:bodyPr wrap="square" lIns="0" rIns="0" tIns="0" bIns="0" anchor="t">
+          <a:bodyPr wrap="square" lIns="0" rIns="0" tIns="0" bIns="0" anchor="ctr">
             <a:spAutoFit/>
           </a:bodyPr>
           <a:lstStyle/>
           <a:p>
-            <a:pPr algn="l">
+            <a:pPr algn="ctr">
               <a:lnSpc>
-                <a:spcPts val="2682"/>
+                <a:spcPts val="1160"/>
               </a:lnSpc>
             </a:pPr>
             <a:r>
-              <a:rPr sz="1850" b="1" spc="50">
+              <a:rPr sz="800" b="1">
                 <a:solidFill>
-                  <a:srgbClr val="FFFFFF"/>
+                  <a:srgbClr val="12151C"/>
                 </a:solidFill>
                 <a:latin typeface="맑은 고딕"/>
                 <a:ea typeface="맑은 고딕"/>
               </a:rPr>
-              <a:t>표세진</a:t>
-            </a:r>
-          </a:p>
-        </p:txBody>
-      </p:sp>
-      <p:sp>
-        <p:nvSpPr>
-          <p:cNvPr id="7" name="텍스트"/>
+              <a:t>간호사</a:t>
+            </a:r>
+          </a:p>
+        </p:txBody>
+      </p:sp>
+      <p:sp>
+        <p:nvSpPr>
+          <p:cNvPr id="4" name="텍스트"/>
           <p:cNvSpPr txBox="1"/>
           <p:nvPr/>
         </p:nvSpPr>
         <p:spPr>
           <a:xfrm>
-            <a:off x="230400" y="475200"/>
-            <a:ext cx="2160000" cy="122400"/>
+            <a:off x="252000" y="568800"/>
+            <a:ext cx="2520000" cy="396000"/>
           </a:xfrm>
           <a:prstGeom prst="rect">
             <a:avLst/>
@@ -3283,32 +3192,32 @@
           <a:p>
             <a:pPr algn="l">
               <a:lnSpc>
-                <a:spcPts val="1232"/>
+                <a:spcPts val="3479"/>
               </a:lnSpc>
             </a:pPr>
             <a:r>
-              <a:rPr sz="850" b="1">
+              <a:rPr sz="2400" b="1">
                 <a:solidFill>
-                  <a:srgbClr val="FFFFFF"/>
+                  <a:srgbClr val="12151C"/>
                 </a:solidFill>
                 <a:latin typeface="맑은 고딕"/>
                 <a:ea typeface="맑은 고딕"/>
               </a:rPr>
-              <a:t>간호사</a:t>
-            </a:r>
-          </a:p>
-        </p:txBody>
-      </p:sp>
-      <p:sp>
-        <p:nvSpPr>
-          <p:cNvPr id="8" name="텍스트"/>
+              <a:t>표세진</a:t>
+            </a:r>
+          </a:p>
+        </p:txBody>
+      </p:sp>
+      <p:sp>
+        <p:nvSpPr>
+          <p:cNvPr id="5" name="텍스트"/>
           <p:cNvSpPr txBox="1"/>
           <p:nvPr/>
         </p:nvSpPr>
         <p:spPr>
           <a:xfrm>
-            <a:off x="230400" y="835200"/>
-            <a:ext cx="1800000" cy="100800"/>
+            <a:off x="252000" y="993600"/>
+            <a:ext cx="2160000" cy="152401"/>
           </a:xfrm>
           <a:prstGeom prst="rect">
             <a:avLst/>
@@ -3323,13 +3232,13 @@
           <a:p>
             <a:pPr algn="l">
               <a:lnSpc>
-                <a:spcPts val="1087"/>
+                <a:spcPts val="1160"/>
               </a:lnSpc>
             </a:pPr>
             <a:r>
-              <a:rPr sz="750" b="1" spc="150">
+              <a:rPr sz="800" b="0">
                 <a:solidFill>
-                  <a:srgbClr val="63755A"/>
+                  <a:srgbClr val="6B7280"/>
                 </a:solidFill>
                 <a:latin typeface="맑은 고딕"/>
                 <a:ea typeface="맑은 고딕"/>
@@ -3339,16 +3248,37 @@
           </a:p>
         </p:txBody>
       </p:sp>
-      <p:sp>
-        <p:nvSpPr>
-          <p:cNvPr id="9" name="텍스트"/>
+      <p:cxnSp>
+        <p:nvCxnSpPr>
+          <p:cNvPr id="6" name="Connector 5"/>
+          <p:cNvCxnSpPr/>
+          <p:nvPr/>
+        </p:nvCxnSpPr>
+        <p:spPr>
+          <a:xfrm>
+            <a:off x="252000" y="1209600"/>
+            <a:ext cx="2736000" cy="0"/>
+          </a:xfrm>
+          <a:prstGeom prst="line">
+            <a:avLst/>
+          </a:prstGeom>
+          <a:ln w="5760">
+            <a:solidFill>
+              <a:srgbClr val="E3E5E9"/>
+            </a:solidFill>
+          </a:ln>
+        </p:spPr>
+      </p:cxnSp>
+      <p:sp>
+        <p:nvSpPr>
+          <p:cNvPr id="7" name="텍스트"/>
           <p:cNvSpPr txBox="1"/>
           <p:nvPr/>
         </p:nvSpPr>
         <p:spPr>
           <a:xfrm>
-            <a:off x="230400" y="1015200"/>
-            <a:ext cx="122400" cy="168911"/>
+            <a:off x="252000" y="1299600"/>
+            <a:ext cx="331200" cy="99061"/>
           </a:xfrm>
           <a:prstGeom prst="rect">
             <a:avLst/>
@@ -3363,32 +3293,32 @@
           <a:p>
             <a:pPr algn="l">
               <a:lnSpc>
-                <a:spcPts val="1015"/>
+                <a:spcPts val="754"/>
               </a:lnSpc>
             </a:pPr>
             <a:r>
-              <a:rPr sz="700" b="1">
+              <a:rPr sz="520" b="1" spc="120">
                 <a:solidFill>
-                  <a:srgbClr val="4A7833"/>
+                  <a:srgbClr val="6B7280"/>
                 </a:solidFill>
                 <a:latin typeface="맑은 고딕"/>
                 <a:ea typeface="맑은 고딕"/>
               </a:rPr>
-              <a:t>T</a:t>
-            </a:r>
-          </a:p>
-        </p:txBody>
-      </p:sp>
-      <p:sp>
-        <p:nvSpPr>
-          <p:cNvPr id="10" name="텍스트"/>
+              <a:t>TEL</a:t>
+            </a:r>
+          </a:p>
+        </p:txBody>
+      </p:sp>
+      <p:sp>
+        <p:nvSpPr>
+          <p:cNvPr id="8" name="텍스트"/>
           <p:cNvSpPr txBox="1"/>
           <p:nvPr/>
         </p:nvSpPr>
         <p:spPr>
           <a:xfrm>
-            <a:off x="374400" y="1015200"/>
-            <a:ext cx="1872000" cy="168911"/>
+            <a:off x="583200" y="1288800"/>
+            <a:ext cx="1512000" cy="129541"/>
           </a:xfrm>
           <a:prstGeom prst="rect">
             <a:avLst/>
@@ -3403,13 +3333,13 @@
           <a:p>
             <a:pPr algn="l">
               <a:lnSpc>
-                <a:spcPts val="1015"/>
+                <a:spcPts val="986"/>
               </a:lnSpc>
             </a:pPr>
             <a:r>
-              <a:rPr sz="700" b="0">
+              <a:rPr sz="680" b="0">
                 <a:solidFill>
-                  <a:srgbClr val="314F22"/>
+                  <a:srgbClr val="12151C"/>
                 </a:solidFill>
                 <a:latin typeface="맑은 고딕"/>
                 <a:ea typeface="맑은 고딕"/>
@@ -3421,14 +3351,14 @@
       </p:sp>
       <p:sp>
         <p:nvSpPr>
-          <p:cNvPr id="11" name="텍스트"/>
+          <p:cNvPr id="9" name="텍스트"/>
           <p:cNvSpPr txBox="1"/>
           <p:nvPr/>
         </p:nvSpPr>
         <p:spPr>
           <a:xfrm>
-            <a:off x="230400" y="1184111"/>
-            <a:ext cx="122400" cy="168911"/>
+            <a:off x="252000" y="1429200"/>
+            <a:ext cx="331200" cy="99061"/>
           </a:xfrm>
           <a:prstGeom prst="rect">
             <a:avLst/>
@@ -3443,32 +3373,32 @@
           <a:p>
             <a:pPr algn="l">
               <a:lnSpc>
-                <a:spcPts val="1015"/>
+                <a:spcPts val="754"/>
               </a:lnSpc>
             </a:pPr>
             <a:r>
-              <a:rPr sz="700" b="1">
+              <a:rPr sz="520" b="1" spc="120">
                 <a:solidFill>
-                  <a:srgbClr val="4A7833"/>
+                  <a:srgbClr val="6B7280"/>
                 </a:solidFill>
                 <a:latin typeface="맑은 고딕"/>
                 <a:ea typeface="맑은 고딕"/>
               </a:rPr>
-              <a:t>E</a:t>
-            </a:r>
-          </a:p>
-        </p:txBody>
-      </p:sp>
-      <p:sp>
-        <p:nvSpPr>
-          <p:cNvPr id="12" name="텍스트"/>
+              <a:t>MAIL</a:t>
+            </a:r>
+          </a:p>
+        </p:txBody>
+      </p:sp>
+      <p:sp>
+        <p:nvSpPr>
+          <p:cNvPr id="10" name="텍스트"/>
           <p:cNvSpPr txBox="1"/>
           <p:nvPr/>
         </p:nvSpPr>
         <p:spPr>
           <a:xfrm>
-            <a:off x="374400" y="1184111"/>
-            <a:ext cx="1872000" cy="168911"/>
+            <a:off x="583200" y="1418400"/>
+            <a:ext cx="1512000" cy="129541"/>
           </a:xfrm>
           <a:prstGeom prst="rect">
             <a:avLst/>
@@ -3483,13 +3413,13 @@
           <a:p>
             <a:pPr algn="l">
               <a:lnSpc>
-                <a:spcPts val="1015"/>
+                <a:spcPts val="986"/>
               </a:lnSpc>
             </a:pPr>
             <a:r>
-              <a:rPr sz="700" b="0">
+              <a:rPr sz="680" b="0">
                 <a:solidFill>
-                  <a:srgbClr val="314F22"/>
+                  <a:srgbClr val="12151C"/>
                 </a:solidFill>
                 <a:latin typeface="맑은 고딕"/>
                 <a:ea typeface="맑은 고딕"/>
@@ -3501,14 +3431,14 @@
       </p:sp>
       <p:sp>
         <p:nvSpPr>
-          <p:cNvPr id="13" name="텍스트"/>
+          <p:cNvPr id="11" name="텍스트"/>
           <p:cNvSpPr txBox="1"/>
           <p:nvPr/>
         </p:nvSpPr>
         <p:spPr>
           <a:xfrm>
-            <a:off x="230400" y="1353022"/>
-            <a:ext cx="122400" cy="168911"/>
+            <a:off x="252000" y="1558800"/>
+            <a:ext cx="331200" cy="99061"/>
           </a:xfrm>
           <a:prstGeom prst="rect">
             <a:avLst/>
@@ -3523,32 +3453,32 @@
           <a:p>
             <a:pPr algn="l">
               <a:lnSpc>
-                <a:spcPts val="1015"/>
+                <a:spcPts val="754"/>
               </a:lnSpc>
             </a:pPr>
             <a:r>
-              <a:rPr sz="700" b="1">
+              <a:rPr sz="520" b="1" spc="120">
                 <a:solidFill>
-                  <a:srgbClr val="4A7833"/>
+                  <a:srgbClr val="6B7280"/>
                 </a:solidFill>
                 <a:latin typeface="맑은 고딕"/>
                 <a:ea typeface="맑은 고딕"/>
               </a:rPr>
-              <a:t>A</a:t>
-            </a:r>
-          </a:p>
-        </p:txBody>
-      </p:sp>
-      <p:sp>
-        <p:nvSpPr>
-          <p:cNvPr id="14" name="텍스트"/>
+              <a:t>ADDR</a:t>
+            </a:r>
+          </a:p>
+        </p:txBody>
+      </p:sp>
+      <p:sp>
+        <p:nvSpPr>
+          <p:cNvPr id="12" name="텍스트"/>
           <p:cNvSpPr txBox="1"/>
           <p:nvPr/>
         </p:nvSpPr>
         <p:spPr>
           <a:xfrm>
-            <a:off x="374400" y="1353022"/>
-            <a:ext cx="1872000" cy="168911"/>
+            <a:off x="583200" y="1548000"/>
+            <a:ext cx="1512000" cy="129541"/>
           </a:xfrm>
           <a:prstGeom prst="rect">
             <a:avLst/>
@@ -3563,13 +3493,13 @@
           <a:p>
             <a:pPr algn="l">
               <a:lnSpc>
-                <a:spcPts val="1015"/>
+                <a:spcPts val="986"/>
               </a:lnSpc>
             </a:pPr>
             <a:r>
-              <a:rPr sz="700" b="0">
+              <a:rPr sz="680" b="0">
                 <a:solidFill>
-                  <a:srgbClr val="314F22"/>
+                  <a:srgbClr val="12151C"/>
                 </a:solidFill>
                 <a:latin typeface="맑은 고딕"/>
                 <a:ea typeface="맑은 고딕"/>
@@ -3593,7 +3523,7 @@
     <p:bg>
       <p:bgPr>
         <a:solidFill>
-          <a:srgbClr val="314F22"/>
+          <a:srgbClr val="0E1116"/>
         </a:solidFill>
         <a:effectLst/>
       </p:bgPr>
@@ -3607,136 +3537,14 @@
       <p:grpSpPr/>
       <p:sp>
         <p:nvSpPr>
-          <p:cNvPr id="2" name="Rectangle 1"/>
-          <p:cNvSpPr/>
+          <p:cNvPr id="2" name="텍스트"/>
+          <p:cNvSpPr txBox="1"/>
           <p:nvPr/>
         </p:nvSpPr>
         <p:spPr>
           <a:xfrm>
-            <a:off x="0" y="0"/>
-            <a:ext cx="3240000" cy="1800000"/>
-          </a:xfrm>
-          <a:prstGeom prst="rect">
-            <a:avLst/>
-          </a:prstGeom>
-          <a:solidFill>
-            <a:srgbClr val="8AB375"/>
-          </a:solidFill>
-          <a:ln>
-            <a:noFill/>
-          </a:ln>
-        </p:spPr>
-        <p:txBody>
-          <a:bodyPr rtlCol="0" anchor="ctr"/>
-          <a:lstStyle/>
-          <a:p>
-            <a:pPr algn="ctr"/>
-          </a:p>
-        </p:txBody>
-      </p:sp>
-      <p:sp>
-        <p:nvSpPr>
-          <p:cNvPr id="3" name="Oval 2"/>
-          <p:cNvSpPr/>
-          <p:nvPr/>
-        </p:nvSpPr>
-        <p:spPr>
-          <a:xfrm>
-            <a:off x="1454400" y="374400"/>
-            <a:ext cx="331200" cy="331200"/>
-          </a:xfrm>
-          <a:prstGeom prst="ellipse">
-            <a:avLst/>
-          </a:prstGeom>
-          <a:solidFill>
-            <a:srgbClr val="FFFFFF">
-              <a:alpha val="35000"/>
-            </a:srgbClr>
-          </a:solidFill>
-          <a:ln>
-            <a:noFill/>
-          </a:ln>
-        </p:spPr>
-        <p:txBody>
-          <a:bodyPr rtlCol="0" anchor="ctr"/>
-          <a:lstStyle/>
-          <a:p>
-            <a:pPr algn="ctr"/>
-          </a:p>
-        </p:txBody>
-      </p:sp>
-      <p:sp>
-        <p:nvSpPr>
-          <p:cNvPr id="4" name="Rounded Rectangle 3"/>
-          <p:cNvSpPr/>
-          <p:nvPr/>
-        </p:nvSpPr>
-        <p:spPr>
-          <a:xfrm>
-            <a:off x="1573200" y="417600"/>
-            <a:ext cx="93600" cy="244800"/>
-          </a:xfrm>
-          <a:prstGeom prst="roundRect">
-            <a:avLst>
-              <a:gd name="adj" fmla="val 11538"/>
-            </a:avLst>
-          </a:prstGeom>
-          <a:solidFill>
-            <a:srgbClr val="FFFFFF"/>
-          </a:solidFill>
-          <a:ln>
-            <a:noFill/>
-          </a:ln>
-        </p:spPr>
-        <p:txBody>
-          <a:bodyPr rtlCol="0" anchor="ctr"/>
-          <a:lstStyle/>
-          <a:p>
-            <a:pPr algn="ctr"/>
-          </a:p>
-        </p:txBody>
-      </p:sp>
-      <p:sp>
-        <p:nvSpPr>
-          <p:cNvPr id="5" name="Rounded Rectangle 4"/>
-          <p:cNvSpPr/>
-          <p:nvPr/>
-        </p:nvSpPr>
-        <p:spPr>
-          <a:xfrm>
-            <a:off x="1497600" y="493200"/>
-            <a:ext cx="244800" cy="93600"/>
-          </a:xfrm>
-          <a:prstGeom prst="roundRect">
-            <a:avLst>
-              <a:gd name="adj" fmla="val 11538"/>
-            </a:avLst>
-          </a:prstGeom>
-          <a:solidFill>
-            <a:srgbClr val="FFFFFF"/>
-          </a:solidFill>
-          <a:ln>
-            <a:noFill/>
-          </a:ln>
-        </p:spPr>
-        <p:txBody>
-          <a:bodyPr rtlCol="0" anchor="ctr"/>
-          <a:lstStyle/>
-          <a:p>
-            <a:pPr algn="ctr"/>
-          </a:p>
-        </p:txBody>
-      </p:sp>
-      <p:sp>
-        <p:nvSpPr>
-          <p:cNvPr id="6" name="텍스트"/>
-          <p:cNvSpPr txBox="1"/>
-          <p:nvPr/>
-        </p:nvSpPr>
-        <p:spPr>
-          <a:xfrm>
-            <a:off x="396000" y="835200"/>
-            <a:ext cx="2448000" cy="396000"/>
+            <a:off x="216000" y="72000"/>
+            <a:ext cx="1080000" cy="936000"/>
           </a:xfrm>
           <a:prstGeom prst="rect">
             <a:avLst/>
@@ -3744,18 +3552,58 @@
           <a:noFill/>
         </p:spPr>
         <p:txBody>
-          <a:bodyPr wrap="square" lIns="0" rIns="0" tIns="0" bIns="0" anchor="ctr">
+          <a:bodyPr wrap="square" lIns="0" rIns="0" tIns="0" bIns="0" anchor="t">
             <a:spAutoFit/>
           </a:bodyPr>
           <a:lstStyle/>
           <a:p>
-            <a:pPr algn="ctr">
+            <a:pPr algn="l">
               <a:lnSpc>
-                <a:spcPts val="1667"/>
+                <a:spcPts val="15950"/>
               </a:lnSpc>
             </a:pPr>
             <a:r>
-              <a:rPr sz="1150" b="1">
+              <a:rPr sz="11000" b="1">
+                <a:solidFill>
+                  <a:srgbClr val="FF8FB8"/>
+                </a:solidFill>
+                <a:latin typeface="맑은 고딕"/>
+                <a:ea typeface="맑은 고딕"/>
+              </a:rPr>
+              <a:t>“</a:t>
+            </a:r>
+          </a:p>
+        </p:txBody>
+      </p:sp>
+      <p:sp>
+        <p:nvSpPr>
+          <p:cNvPr id="3" name="텍스트"/>
+          <p:cNvSpPr txBox="1"/>
+          <p:nvPr/>
+        </p:nvSpPr>
+        <p:spPr>
+          <a:xfrm>
+            <a:off x="252000" y="792000"/>
+            <a:ext cx="2520000" cy="648000"/>
+          </a:xfrm>
+          <a:prstGeom prst="rect">
+            <a:avLst/>
+          </a:prstGeom>
+          <a:noFill/>
+        </p:spPr>
+        <p:txBody>
+          <a:bodyPr wrap="square" lIns="0" rIns="0" tIns="0" bIns="0" anchor="t">
+            <a:spAutoFit/>
+          </a:bodyPr>
+          <a:lstStyle/>
+          <a:p>
+            <a:pPr algn="l">
+              <a:lnSpc>
+                <a:spcPts val="1812"/>
+              </a:lnSpc>
+            </a:pPr>
+            <a:r>
+              <a:rPr sz="1250" b="1">
                 <a:solidFill>
                   <a:srgbClr val="FFFFFF"/>
                 </a:solidFill>
@@ -3767,16 +3615,37 @@
           </a:p>
         </p:txBody>
       </p:sp>
-      <p:sp>
-        <p:nvSpPr>
-          <p:cNvPr id="7" name="텍스트"/>
+      <p:cxnSp>
+        <p:nvCxnSpPr>
+          <p:cNvPr id="4" name="Connector 3"/>
+          <p:cNvCxnSpPr/>
+          <p:nvPr/>
+        </p:nvCxnSpPr>
+        <p:spPr>
+          <a:xfrm>
+            <a:off x="252000" y="1512000"/>
+            <a:ext cx="2736000" cy="0"/>
+          </a:xfrm>
+          <a:prstGeom prst="line">
+            <a:avLst/>
+          </a:prstGeom>
+          <a:ln w="5760">
+            <a:solidFill>
+              <a:srgbClr val="2A2F38"/>
+            </a:solidFill>
+          </a:ln>
+        </p:spPr>
+      </p:cxnSp>
+      <p:sp>
+        <p:nvSpPr>
+          <p:cNvPr id="5" name="텍스트"/>
           <p:cNvSpPr txBox="1"/>
           <p:nvPr/>
         </p:nvSpPr>
         <p:spPr>
           <a:xfrm>
-            <a:off x="360000" y="1476000"/>
-            <a:ext cx="2520000" cy="108000"/>
+            <a:off x="252000" y="1569600"/>
+            <a:ext cx="2736000" cy="123826"/>
           </a:xfrm>
           <a:prstGeom prst="rect">
             <a:avLst/>
@@ -3789,15 +3658,15 @@
           </a:bodyPr>
           <a:lstStyle/>
           <a:p>
-            <a:pPr algn="ctr">
+            <a:pPr algn="r">
               <a:lnSpc>
-                <a:spcPts val="1015"/>
+                <a:spcPts val="942"/>
               </a:lnSpc>
             </a:pPr>
             <a:r>
-              <a:rPr sz="700" b="1" spc="300">
+              <a:rPr sz="650" b="1" spc="200">
                 <a:solidFill>
-                  <a:srgbClr val="FFFFFF"/>
+                  <a:srgbClr val="A3A9B5"/>
                 </a:solidFill>
                 <a:latin typeface="맑은 고딕"/>
                 <a:ea typeface="맑은 고딕"/>

--- a/public/fun/cards/care/care-33.pptx
+++ b/public/fun/cards/care/care-33.pptx
@@ -3099,19 +3099,17 @@
       <p:grpSpPr/>
       <p:sp>
         <p:nvSpPr>
-          <p:cNvPr id="2" name="Rounded Rectangle 1"/>
+          <p:cNvPr id="2" name="Oval 1"/>
           <p:cNvSpPr/>
           <p:nvPr/>
         </p:nvSpPr>
         <p:spPr>
           <a:xfrm>
-            <a:off x="252000" y="230400"/>
-            <a:ext cx="575852" cy="180000"/>
-          </a:xfrm>
-          <a:prstGeom prst="roundRect">
-            <a:avLst>
-              <a:gd name="adj" fmla="val 50000"/>
-            </a:avLst>
+            <a:off x="2658960" y="239760"/>
+            <a:ext cx="24480" cy="24480"/>
+          </a:xfrm>
+          <a:prstGeom prst="ellipse">
+            <a:avLst/>
           </a:prstGeom>
           <a:solidFill>
             <a:srgbClr val="FF8FB8"/>
@@ -3130,14 +3128,596 @@
       </p:sp>
       <p:sp>
         <p:nvSpPr>
-          <p:cNvPr id="3" name="텍스트"/>
+          <p:cNvPr id="3" name="Oval 2"/>
+          <p:cNvSpPr/>
+          <p:nvPr/>
+        </p:nvSpPr>
+        <p:spPr>
+          <a:xfrm>
+            <a:off x="2658960" y="333360"/>
+            <a:ext cx="24480" cy="24480"/>
+          </a:xfrm>
+          <a:prstGeom prst="ellipse">
+            <a:avLst/>
+          </a:prstGeom>
+          <a:solidFill>
+            <a:srgbClr val="E3E5E9"/>
+          </a:solidFill>
+          <a:ln>
+            <a:noFill/>
+          </a:ln>
+        </p:spPr>
+        <p:txBody>
+          <a:bodyPr rtlCol="0" anchor="ctr"/>
+          <a:lstStyle/>
+          <a:p>
+            <a:pPr algn="ctr"/>
+          </a:p>
+        </p:txBody>
+      </p:sp>
+      <p:sp>
+        <p:nvSpPr>
+          <p:cNvPr id="4" name="Oval 3"/>
+          <p:cNvSpPr/>
+          <p:nvPr/>
+        </p:nvSpPr>
+        <p:spPr>
+          <a:xfrm>
+            <a:off x="2658960" y="426960"/>
+            <a:ext cx="24480" cy="24480"/>
+          </a:xfrm>
+          <a:prstGeom prst="ellipse">
+            <a:avLst/>
+          </a:prstGeom>
+          <a:solidFill>
+            <a:srgbClr val="E3E5E9"/>
+          </a:solidFill>
+          <a:ln>
+            <a:noFill/>
+          </a:ln>
+        </p:spPr>
+        <p:txBody>
+          <a:bodyPr rtlCol="0" anchor="ctr"/>
+          <a:lstStyle/>
+          <a:p>
+            <a:pPr algn="ctr"/>
+          </a:p>
+        </p:txBody>
+      </p:sp>
+      <p:sp>
+        <p:nvSpPr>
+          <p:cNvPr id="5" name="Oval 4"/>
+          <p:cNvSpPr/>
+          <p:nvPr/>
+        </p:nvSpPr>
+        <p:spPr>
+          <a:xfrm>
+            <a:off x="2658960" y="520560"/>
+            <a:ext cx="24480" cy="24480"/>
+          </a:xfrm>
+          <a:prstGeom prst="ellipse">
+            <a:avLst/>
+          </a:prstGeom>
+          <a:solidFill>
+            <a:srgbClr val="E3E5E9"/>
+          </a:solidFill>
+          <a:ln>
+            <a:noFill/>
+          </a:ln>
+        </p:spPr>
+        <p:txBody>
+          <a:bodyPr rtlCol="0" anchor="ctr"/>
+          <a:lstStyle/>
+          <a:p>
+            <a:pPr algn="ctr"/>
+          </a:p>
+        </p:txBody>
+      </p:sp>
+      <p:sp>
+        <p:nvSpPr>
+          <p:cNvPr id="6" name="Oval 5"/>
+          <p:cNvSpPr/>
+          <p:nvPr/>
+        </p:nvSpPr>
+        <p:spPr>
+          <a:xfrm>
+            <a:off x="2752560" y="239760"/>
+            <a:ext cx="24480" cy="24480"/>
+          </a:xfrm>
+          <a:prstGeom prst="ellipse">
+            <a:avLst/>
+          </a:prstGeom>
+          <a:solidFill>
+            <a:srgbClr val="E3E5E9"/>
+          </a:solidFill>
+          <a:ln>
+            <a:noFill/>
+          </a:ln>
+        </p:spPr>
+        <p:txBody>
+          <a:bodyPr rtlCol="0" anchor="ctr"/>
+          <a:lstStyle/>
+          <a:p>
+            <a:pPr algn="ctr"/>
+          </a:p>
+        </p:txBody>
+      </p:sp>
+      <p:sp>
+        <p:nvSpPr>
+          <p:cNvPr id="7" name="Oval 6"/>
+          <p:cNvSpPr/>
+          <p:nvPr/>
+        </p:nvSpPr>
+        <p:spPr>
+          <a:xfrm>
+            <a:off x="2752560" y="333360"/>
+            <a:ext cx="24480" cy="24480"/>
+          </a:xfrm>
+          <a:prstGeom prst="ellipse">
+            <a:avLst/>
+          </a:prstGeom>
+          <a:solidFill>
+            <a:srgbClr val="E3E5E9"/>
+          </a:solidFill>
+          <a:ln>
+            <a:noFill/>
+          </a:ln>
+        </p:spPr>
+        <p:txBody>
+          <a:bodyPr rtlCol="0" anchor="ctr"/>
+          <a:lstStyle/>
+          <a:p>
+            <a:pPr algn="ctr"/>
+          </a:p>
+        </p:txBody>
+      </p:sp>
+      <p:sp>
+        <p:nvSpPr>
+          <p:cNvPr id="8" name="Oval 7"/>
+          <p:cNvSpPr/>
+          <p:nvPr/>
+        </p:nvSpPr>
+        <p:spPr>
+          <a:xfrm>
+            <a:off x="2752560" y="426960"/>
+            <a:ext cx="24480" cy="24480"/>
+          </a:xfrm>
+          <a:prstGeom prst="ellipse">
+            <a:avLst/>
+          </a:prstGeom>
+          <a:solidFill>
+            <a:srgbClr val="E3E5E9"/>
+          </a:solidFill>
+          <a:ln>
+            <a:noFill/>
+          </a:ln>
+        </p:spPr>
+        <p:txBody>
+          <a:bodyPr rtlCol="0" anchor="ctr"/>
+          <a:lstStyle/>
+          <a:p>
+            <a:pPr algn="ctr"/>
+          </a:p>
+        </p:txBody>
+      </p:sp>
+      <p:sp>
+        <p:nvSpPr>
+          <p:cNvPr id="9" name="Oval 8"/>
+          <p:cNvSpPr/>
+          <p:nvPr/>
+        </p:nvSpPr>
+        <p:spPr>
+          <a:xfrm>
+            <a:off x="2752560" y="520560"/>
+            <a:ext cx="24480" cy="24480"/>
+          </a:xfrm>
+          <a:prstGeom prst="ellipse">
+            <a:avLst/>
+          </a:prstGeom>
+          <a:solidFill>
+            <a:srgbClr val="FF8FB8"/>
+          </a:solidFill>
+          <a:ln>
+            <a:noFill/>
+          </a:ln>
+        </p:spPr>
+        <p:txBody>
+          <a:bodyPr rtlCol="0" anchor="ctr"/>
+          <a:lstStyle/>
+          <a:p>
+            <a:pPr algn="ctr"/>
+          </a:p>
+        </p:txBody>
+      </p:sp>
+      <p:sp>
+        <p:nvSpPr>
+          <p:cNvPr id="10" name="Oval 9"/>
+          <p:cNvSpPr/>
+          <p:nvPr/>
+        </p:nvSpPr>
+        <p:spPr>
+          <a:xfrm>
+            <a:off x="2846160" y="239760"/>
+            <a:ext cx="24480" cy="24480"/>
+          </a:xfrm>
+          <a:prstGeom prst="ellipse">
+            <a:avLst/>
+          </a:prstGeom>
+          <a:solidFill>
+            <a:srgbClr val="E3E5E9"/>
+          </a:solidFill>
+          <a:ln>
+            <a:noFill/>
+          </a:ln>
+        </p:spPr>
+        <p:txBody>
+          <a:bodyPr rtlCol="0" anchor="ctr"/>
+          <a:lstStyle/>
+          <a:p>
+            <a:pPr algn="ctr"/>
+          </a:p>
+        </p:txBody>
+      </p:sp>
+      <p:sp>
+        <p:nvSpPr>
+          <p:cNvPr id="11" name="Oval 10"/>
+          <p:cNvSpPr/>
+          <p:nvPr/>
+        </p:nvSpPr>
+        <p:spPr>
+          <a:xfrm>
+            <a:off x="2846160" y="333360"/>
+            <a:ext cx="24480" cy="24480"/>
+          </a:xfrm>
+          <a:prstGeom prst="ellipse">
+            <a:avLst/>
+          </a:prstGeom>
+          <a:solidFill>
+            <a:srgbClr val="E3E5E9"/>
+          </a:solidFill>
+          <a:ln>
+            <a:noFill/>
+          </a:ln>
+        </p:spPr>
+        <p:txBody>
+          <a:bodyPr rtlCol="0" anchor="ctr"/>
+          <a:lstStyle/>
+          <a:p>
+            <a:pPr algn="ctr"/>
+          </a:p>
+        </p:txBody>
+      </p:sp>
+      <p:sp>
+        <p:nvSpPr>
+          <p:cNvPr id="12" name="Oval 11"/>
+          <p:cNvSpPr/>
+          <p:nvPr/>
+        </p:nvSpPr>
+        <p:spPr>
+          <a:xfrm>
+            <a:off x="2846160" y="426960"/>
+            <a:ext cx="24480" cy="24480"/>
+          </a:xfrm>
+          <a:prstGeom prst="ellipse">
+            <a:avLst/>
+          </a:prstGeom>
+          <a:solidFill>
+            <a:srgbClr val="FF8FB8"/>
+          </a:solidFill>
+          <a:ln>
+            <a:noFill/>
+          </a:ln>
+        </p:spPr>
+        <p:txBody>
+          <a:bodyPr rtlCol="0" anchor="ctr"/>
+          <a:lstStyle/>
+          <a:p>
+            <a:pPr algn="ctr"/>
+          </a:p>
+        </p:txBody>
+      </p:sp>
+      <p:sp>
+        <p:nvSpPr>
+          <p:cNvPr id="13" name="Oval 12"/>
+          <p:cNvSpPr/>
+          <p:nvPr/>
+        </p:nvSpPr>
+        <p:spPr>
+          <a:xfrm>
+            <a:off x="2846160" y="520560"/>
+            <a:ext cx="24480" cy="24480"/>
+          </a:xfrm>
+          <a:prstGeom prst="ellipse">
+            <a:avLst/>
+          </a:prstGeom>
+          <a:solidFill>
+            <a:srgbClr val="E3E5E9"/>
+          </a:solidFill>
+          <a:ln>
+            <a:noFill/>
+          </a:ln>
+        </p:spPr>
+        <p:txBody>
+          <a:bodyPr rtlCol="0" anchor="ctr"/>
+          <a:lstStyle/>
+          <a:p>
+            <a:pPr algn="ctr"/>
+          </a:p>
+        </p:txBody>
+      </p:sp>
+      <p:sp>
+        <p:nvSpPr>
+          <p:cNvPr id="14" name="Oval 13"/>
+          <p:cNvSpPr/>
+          <p:nvPr/>
+        </p:nvSpPr>
+        <p:spPr>
+          <a:xfrm>
+            <a:off x="2939760" y="239760"/>
+            <a:ext cx="24480" cy="24480"/>
+          </a:xfrm>
+          <a:prstGeom prst="ellipse">
+            <a:avLst/>
+          </a:prstGeom>
+          <a:solidFill>
+            <a:srgbClr val="E3E5E9"/>
+          </a:solidFill>
+          <a:ln>
+            <a:noFill/>
+          </a:ln>
+        </p:spPr>
+        <p:txBody>
+          <a:bodyPr rtlCol="0" anchor="ctr"/>
+          <a:lstStyle/>
+          <a:p>
+            <a:pPr algn="ctr"/>
+          </a:p>
+        </p:txBody>
+      </p:sp>
+      <p:sp>
+        <p:nvSpPr>
+          <p:cNvPr id="15" name="Oval 14"/>
+          <p:cNvSpPr/>
+          <p:nvPr/>
+        </p:nvSpPr>
+        <p:spPr>
+          <a:xfrm>
+            <a:off x="2939760" y="333360"/>
+            <a:ext cx="24480" cy="24480"/>
+          </a:xfrm>
+          <a:prstGeom prst="ellipse">
+            <a:avLst/>
+          </a:prstGeom>
+          <a:solidFill>
+            <a:srgbClr val="FF8FB8"/>
+          </a:solidFill>
+          <a:ln>
+            <a:noFill/>
+          </a:ln>
+        </p:spPr>
+        <p:txBody>
+          <a:bodyPr rtlCol="0" anchor="ctr"/>
+          <a:lstStyle/>
+          <a:p>
+            <a:pPr algn="ctr"/>
+          </a:p>
+        </p:txBody>
+      </p:sp>
+      <p:sp>
+        <p:nvSpPr>
+          <p:cNvPr id="16" name="Oval 15"/>
+          <p:cNvSpPr/>
+          <p:nvPr/>
+        </p:nvSpPr>
+        <p:spPr>
+          <a:xfrm>
+            <a:off x="2939760" y="426960"/>
+            <a:ext cx="24480" cy="24480"/>
+          </a:xfrm>
+          <a:prstGeom prst="ellipse">
+            <a:avLst/>
+          </a:prstGeom>
+          <a:solidFill>
+            <a:srgbClr val="E3E5E9"/>
+          </a:solidFill>
+          <a:ln>
+            <a:noFill/>
+          </a:ln>
+        </p:spPr>
+        <p:txBody>
+          <a:bodyPr rtlCol="0" anchor="ctr"/>
+          <a:lstStyle/>
+          <a:p>
+            <a:pPr algn="ctr"/>
+          </a:p>
+        </p:txBody>
+      </p:sp>
+      <p:sp>
+        <p:nvSpPr>
+          <p:cNvPr id="17" name="Oval 16"/>
+          <p:cNvSpPr/>
+          <p:nvPr/>
+        </p:nvSpPr>
+        <p:spPr>
+          <a:xfrm>
+            <a:off x="2939760" y="520560"/>
+            <a:ext cx="24480" cy="24480"/>
+          </a:xfrm>
+          <a:prstGeom prst="ellipse">
+            <a:avLst/>
+          </a:prstGeom>
+          <a:solidFill>
+            <a:srgbClr val="E3E5E9"/>
+          </a:solidFill>
+          <a:ln>
+            <a:noFill/>
+          </a:ln>
+        </p:spPr>
+        <p:txBody>
+          <a:bodyPr rtlCol="0" anchor="ctr"/>
+          <a:lstStyle/>
+          <a:p>
+            <a:pPr algn="ctr"/>
+          </a:p>
+        </p:txBody>
+      </p:sp>
+      <p:sp>
+        <p:nvSpPr>
+          <p:cNvPr id="18" name="Oval 17"/>
+          <p:cNvSpPr/>
+          <p:nvPr/>
+        </p:nvSpPr>
+        <p:spPr>
+          <a:xfrm>
+            <a:off x="3033360" y="239760"/>
+            <a:ext cx="24480" cy="24480"/>
+          </a:xfrm>
+          <a:prstGeom prst="ellipse">
+            <a:avLst/>
+          </a:prstGeom>
+          <a:solidFill>
+            <a:srgbClr val="FF8FB8"/>
+          </a:solidFill>
+          <a:ln>
+            <a:noFill/>
+          </a:ln>
+        </p:spPr>
+        <p:txBody>
+          <a:bodyPr rtlCol="0" anchor="ctr"/>
+          <a:lstStyle/>
+          <a:p>
+            <a:pPr algn="ctr"/>
+          </a:p>
+        </p:txBody>
+      </p:sp>
+      <p:sp>
+        <p:nvSpPr>
+          <p:cNvPr id="19" name="Oval 18"/>
+          <p:cNvSpPr/>
+          <p:nvPr/>
+        </p:nvSpPr>
+        <p:spPr>
+          <a:xfrm>
+            <a:off x="3033360" y="333360"/>
+            <a:ext cx="24480" cy="24480"/>
+          </a:xfrm>
+          <a:prstGeom prst="ellipse">
+            <a:avLst/>
+          </a:prstGeom>
+          <a:solidFill>
+            <a:srgbClr val="E3E5E9"/>
+          </a:solidFill>
+          <a:ln>
+            <a:noFill/>
+          </a:ln>
+        </p:spPr>
+        <p:txBody>
+          <a:bodyPr rtlCol="0" anchor="ctr"/>
+          <a:lstStyle/>
+          <a:p>
+            <a:pPr algn="ctr"/>
+          </a:p>
+        </p:txBody>
+      </p:sp>
+      <p:sp>
+        <p:nvSpPr>
+          <p:cNvPr id="20" name="Oval 19"/>
+          <p:cNvSpPr/>
+          <p:nvPr/>
+        </p:nvSpPr>
+        <p:spPr>
+          <a:xfrm>
+            <a:off x="3033360" y="426960"/>
+            <a:ext cx="24480" cy="24480"/>
+          </a:xfrm>
+          <a:prstGeom prst="ellipse">
+            <a:avLst/>
+          </a:prstGeom>
+          <a:solidFill>
+            <a:srgbClr val="E3E5E9"/>
+          </a:solidFill>
+          <a:ln>
+            <a:noFill/>
+          </a:ln>
+        </p:spPr>
+        <p:txBody>
+          <a:bodyPr rtlCol="0" anchor="ctr"/>
+          <a:lstStyle/>
+          <a:p>
+            <a:pPr algn="ctr"/>
+          </a:p>
+        </p:txBody>
+      </p:sp>
+      <p:sp>
+        <p:nvSpPr>
+          <p:cNvPr id="21" name="Oval 20"/>
+          <p:cNvSpPr/>
+          <p:nvPr/>
+        </p:nvSpPr>
+        <p:spPr>
+          <a:xfrm>
+            <a:off x="3033360" y="520560"/>
+            <a:ext cx="24480" cy="24480"/>
+          </a:xfrm>
+          <a:prstGeom prst="ellipse">
+            <a:avLst/>
+          </a:prstGeom>
+          <a:solidFill>
+            <a:srgbClr val="E3E5E9"/>
+          </a:solidFill>
+          <a:ln>
+            <a:noFill/>
+          </a:ln>
+        </p:spPr>
+        <p:txBody>
+          <a:bodyPr rtlCol="0" anchor="ctr"/>
+          <a:lstStyle/>
+          <a:p>
+            <a:pPr algn="ctr"/>
+          </a:p>
+        </p:txBody>
+      </p:sp>
+      <p:sp>
+        <p:nvSpPr>
+          <p:cNvPr id="22" name="Rounded Rectangle 21"/>
+          <p:cNvSpPr/>
+          <p:nvPr/>
+        </p:nvSpPr>
+        <p:spPr>
+          <a:xfrm>
+            <a:off x="252000" y="237600"/>
+            <a:ext cx="540000" cy="165600"/>
+          </a:xfrm>
+          <a:prstGeom prst="roundRect">
+            <a:avLst>
+              <a:gd name="adj" fmla="val 50000"/>
+            </a:avLst>
+          </a:prstGeom>
+          <a:noFill/>
+          <a:ln w="5760">
+            <a:solidFill>
+              <a:srgbClr val="FF8FB8"/>
+            </a:solidFill>
+          </a:ln>
+        </p:spPr>
+        <p:txBody>
+          <a:bodyPr rtlCol="0" anchor="ctr"/>
+          <a:lstStyle/>
+          <a:p>
+            <a:pPr algn="ctr"/>
+          </a:p>
+        </p:txBody>
+      </p:sp>
+      <p:sp>
+        <p:nvSpPr>
+          <p:cNvPr id="23" name="텍스트"/>
           <p:cNvSpPr txBox="1"/>
           <p:nvPr/>
         </p:nvSpPr>
         <p:spPr>
           <a:xfrm>
-            <a:off x="252000" y="230400"/>
-            <a:ext cx="575852" cy="180000"/>
+            <a:off x="252000" y="237600"/>
+            <a:ext cx="540000" cy="165600"/>
           </a:xfrm>
           <a:prstGeom prst="rect">
             <a:avLst/>
@@ -3152,11 +3732,11 @@
           <a:p>
             <a:pPr algn="ctr">
               <a:lnSpc>
-                <a:spcPts val="1160"/>
+                <a:spcPts val="956"/>
               </a:lnSpc>
             </a:pPr>
             <a:r>
-              <a:rPr sz="800" b="1">
+              <a:rPr sz="660" b="1" spc="80">
                 <a:solidFill>
                   <a:srgbClr val="12151C"/>
                 </a:solidFill>
@@ -3170,14 +3750,14 @@
       </p:sp>
       <p:sp>
         <p:nvSpPr>
-          <p:cNvPr id="4" name="텍스트"/>
+          <p:cNvPr id="24" name="텍스트"/>
           <p:cNvSpPr txBox="1"/>
           <p:nvPr/>
         </p:nvSpPr>
         <p:spPr>
           <a:xfrm>
-            <a:off x="252000" y="568800"/>
-            <a:ext cx="2520000" cy="396000"/>
+            <a:off x="252000" y="583200"/>
+            <a:ext cx="2160000" cy="237600"/>
           </a:xfrm>
           <a:prstGeom prst="rect">
             <a:avLst/>
@@ -3192,11 +3772,11 @@
           <a:p>
             <a:pPr algn="l">
               <a:lnSpc>
-                <a:spcPts val="3479"/>
+                <a:spcPts val="1957"/>
               </a:lnSpc>
             </a:pPr>
             <a:r>
-              <a:rPr sz="2400" b="1">
+              <a:rPr sz="1350" b="1" spc="120">
                 <a:solidFill>
                   <a:srgbClr val="12151C"/>
                 </a:solidFill>
@@ -3210,14 +3790,14 @@
       </p:sp>
       <p:sp>
         <p:nvSpPr>
-          <p:cNvPr id="5" name="텍스트"/>
+          <p:cNvPr id="25" name="텍스트"/>
           <p:cNvSpPr txBox="1"/>
           <p:nvPr/>
         </p:nvSpPr>
         <p:spPr>
           <a:xfrm>
-            <a:off x="252000" y="993600"/>
-            <a:ext cx="2160000" cy="152401"/>
+            <a:off x="252000" y="878400"/>
+            <a:ext cx="1800000" cy="123826"/>
           </a:xfrm>
           <a:prstGeom prst="rect">
             <a:avLst/>
@@ -3232,11 +3812,11 @@
           <a:p>
             <a:pPr algn="l">
               <a:lnSpc>
-                <a:spcPts val="1160"/>
+                <a:spcPts val="942"/>
               </a:lnSpc>
             </a:pPr>
             <a:r>
-              <a:rPr sz="800" b="0">
+              <a:rPr sz="650" b="1" spc="220">
                 <a:solidFill>
                   <a:srgbClr val="6B7280"/>
                 </a:solidFill>
@@ -3250,19 +3830,19 @@
       </p:sp>
       <p:cxnSp>
         <p:nvCxnSpPr>
-          <p:cNvPr id="6" name="Connector 5"/>
+          <p:cNvPr id="26" name="Connector 25"/>
           <p:cNvCxnSpPr/>
           <p:nvPr/>
         </p:nvCxnSpPr>
         <p:spPr>
           <a:xfrm>
-            <a:off x="252000" y="1209600"/>
+            <a:off x="252000" y="1144800"/>
             <a:ext cx="2736000" cy="0"/>
           </a:xfrm>
           <a:prstGeom prst="line">
             <a:avLst/>
           </a:prstGeom>
-          <a:ln w="5760">
+          <a:ln w="3600">
             <a:solidFill>
               <a:srgbClr val="E3E5E9"/>
             </a:solidFill>
@@ -3271,14 +3851,14 @@
       </p:cxnSp>
       <p:sp>
         <p:nvSpPr>
-          <p:cNvPr id="7" name="텍스트"/>
+          <p:cNvPr id="27" name="텍스트"/>
           <p:cNvSpPr txBox="1"/>
           <p:nvPr/>
         </p:nvSpPr>
         <p:spPr>
           <a:xfrm>
-            <a:off x="252000" y="1299600"/>
-            <a:ext cx="331200" cy="99061"/>
+            <a:off x="252000" y="1242000"/>
+            <a:ext cx="331200" cy="91441"/>
           </a:xfrm>
           <a:prstGeom prst="rect">
             <a:avLst/>
@@ -3293,11 +3873,11 @@
           <a:p>
             <a:pPr algn="l">
               <a:lnSpc>
-                <a:spcPts val="754"/>
+                <a:spcPts val="696"/>
               </a:lnSpc>
             </a:pPr>
             <a:r>
-              <a:rPr sz="520" b="1" spc="120">
+              <a:rPr sz="480" b="1" spc="140">
                 <a:solidFill>
                   <a:srgbClr val="6B7280"/>
                 </a:solidFill>
@@ -3311,14 +3891,14 @@
       </p:sp>
       <p:sp>
         <p:nvSpPr>
-          <p:cNvPr id="8" name="텍스트"/>
+          <p:cNvPr id="28" name="텍스트"/>
           <p:cNvSpPr txBox="1"/>
           <p:nvPr/>
         </p:nvSpPr>
         <p:spPr>
           <a:xfrm>
-            <a:off x="583200" y="1288800"/>
-            <a:ext cx="1512000" cy="129541"/>
+            <a:off x="583200" y="1231200"/>
+            <a:ext cx="1512000" cy="123826"/>
           </a:xfrm>
           <a:prstGeom prst="rect">
             <a:avLst/>
@@ -3333,11 +3913,11 @@
           <a:p>
             <a:pPr algn="l">
               <a:lnSpc>
-                <a:spcPts val="986"/>
+                <a:spcPts val="942"/>
               </a:lnSpc>
             </a:pPr>
             <a:r>
-              <a:rPr sz="680" b="0">
+              <a:rPr sz="650" b="0">
                 <a:solidFill>
                   <a:srgbClr val="12151C"/>
                 </a:solidFill>
@@ -3351,14 +3931,14 @@
       </p:sp>
       <p:sp>
         <p:nvSpPr>
-          <p:cNvPr id="9" name="텍스트"/>
+          <p:cNvPr id="29" name="텍스트"/>
           <p:cNvSpPr txBox="1"/>
           <p:nvPr/>
         </p:nvSpPr>
         <p:spPr>
           <a:xfrm>
-            <a:off x="252000" y="1429200"/>
-            <a:ext cx="331200" cy="99061"/>
+            <a:off x="252000" y="1371600"/>
+            <a:ext cx="331200" cy="91441"/>
           </a:xfrm>
           <a:prstGeom prst="rect">
             <a:avLst/>
@@ -3373,11 +3953,11 @@
           <a:p>
             <a:pPr algn="l">
               <a:lnSpc>
-                <a:spcPts val="754"/>
+                <a:spcPts val="696"/>
               </a:lnSpc>
             </a:pPr>
             <a:r>
-              <a:rPr sz="520" b="1" spc="120">
+              <a:rPr sz="480" b="1" spc="140">
                 <a:solidFill>
                   <a:srgbClr val="6B7280"/>
                 </a:solidFill>
@@ -3391,14 +3971,14 @@
       </p:sp>
       <p:sp>
         <p:nvSpPr>
-          <p:cNvPr id="10" name="텍스트"/>
+          <p:cNvPr id="30" name="텍스트"/>
           <p:cNvSpPr txBox="1"/>
           <p:nvPr/>
         </p:nvSpPr>
         <p:spPr>
           <a:xfrm>
-            <a:off x="583200" y="1418400"/>
-            <a:ext cx="1512000" cy="129541"/>
+            <a:off x="583200" y="1360800"/>
+            <a:ext cx="1512000" cy="123826"/>
           </a:xfrm>
           <a:prstGeom prst="rect">
             <a:avLst/>
@@ -3413,11 +3993,11 @@
           <a:p>
             <a:pPr algn="l">
               <a:lnSpc>
-                <a:spcPts val="986"/>
+                <a:spcPts val="942"/>
               </a:lnSpc>
             </a:pPr>
             <a:r>
-              <a:rPr sz="680" b="0">
+              <a:rPr sz="650" b="0">
                 <a:solidFill>
                   <a:srgbClr val="12151C"/>
                 </a:solidFill>
@@ -3431,14 +4011,14 @@
       </p:sp>
       <p:sp>
         <p:nvSpPr>
-          <p:cNvPr id="11" name="텍스트"/>
+          <p:cNvPr id="31" name="텍스트"/>
           <p:cNvSpPr txBox="1"/>
           <p:nvPr/>
         </p:nvSpPr>
         <p:spPr>
           <a:xfrm>
-            <a:off x="252000" y="1558800"/>
-            <a:ext cx="331200" cy="99061"/>
+            <a:off x="252000" y="1501200"/>
+            <a:ext cx="331200" cy="91441"/>
           </a:xfrm>
           <a:prstGeom prst="rect">
             <a:avLst/>
@@ -3453,11 +4033,11 @@
           <a:p>
             <a:pPr algn="l">
               <a:lnSpc>
-                <a:spcPts val="754"/>
+                <a:spcPts val="696"/>
               </a:lnSpc>
             </a:pPr>
             <a:r>
-              <a:rPr sz="520" b="1" spc="120">
+              <a:rPr sz="480" b="1" spc="140">
                 <a:solidFill>
                   <a:srgbClr val="6B7280"/>
                 </a:solidFill>
@@ -3471,14 +4051,14 @@
       </p:sp>
       <p:sp>
         <p:nvSpPr>
-          <p:cNvPr id="12" name="텍스트"/>
+          <p:cNvPr id="32" name="텍스트"/>
           <p:cNvSpPr txBox="1"/>
           <p:nvPr/>
         </p:nvSpPr>
         <p:spPr>
           <a:xfrm>
-            <a:off x="583200" y="1548000"/>
-            <a:ext cx="1512000" cy="129541"/>
+            <a:off x="583200" y="1490400"/>
+            <a:ext cx="1512000" cy="123826"/>
           </a:xfrm>
           <a:prstGeom prst="rect">
             <a:avLst/>
@@ -3493,11 +4073,11 @@
           <a:p>
             <a:pPr algn="l">
               <a:lnSpc>
-                <a:spcPts val="986"/>
+                <a:spcPts val="942"/>
               </a:lnSpc>
             </a:pPr>
             <a:r>
-              <a:rPr sz="680" b="0">
+              <a:rPr sz="650" b="0">
                 <a:solidFill>
                   <a:srgbClr val="12151C"/>
                 </a:solidFill>
@@ -3509,6 +4089,48 @@
           </a:p>
         </p:txBody>
       </p:sp>
+      <p:cxnSp>
+        <p:nvCxnSpPr>
+          <p:cNvPr id="33" name="Connector 32"/>
+          <p:cNvCxnSpPr/>
+          <p:nvPr/>
+        </p:nvCxnSpPr>
+        <p:spPr>
+          <a:xfrm>
+            <a:off x="2955600" y="1584000"/>
+            <a:ext cx="64800" cy="0"/>
+          </a:xfrm>
+          <a:prstGeom prst="line">
+            <a:avLst/>
+          </a:prstGeom>
+          <a:ln w="3600">
+            <a:solidFill>
+              <a:srgbClr val="E3E5E9"/>
+            </a:solidFill>
+          </a:ln>
+        </p:spPr>
+      </p:cxnSp>
+      <p:cxnSp>
+        <p:nvCxnSpPr>
+          <p:cNvPr id="34" name="Connector 33"/>
+          <p:cNvCxnSpPr/>
+          <p:nvPr/>
+        </p:nvCxnSpPr>
+        <p:spPr>
+          <a:xfrm>
+            <a:off x="2988000" y="1551600"/>
+            <a:ext cx="0" cy="64800"/>
+          </a:xfrm>
+          <a:prstGeom prst="line">
+            <a:avLst/>
+          </a:prstGeom>
+          <a:ln w="3600">
+            <a:solidFill>
+              <a:srgbClr val="E3E5E9"/>
+            </a:solidFill>
+          </a:ln>
+        </p:spPr>
+      </p:cxnSp>
     </p:spTree>
   </p:cSld>
   <p:clrMapOvr>
@@ -3537,14 +4159,74 @@
       <p:grpSpPr/>
       <p:sp>
         <p:nvSpPr>
-          <p:cNvPr id="2" name="텍스트"/>
+          <p:cNvPr id="2" name="Rectangle 1"/>
+          <p:cNvSpPr/>
+          <p:nvPr/>
+        </p:nvSpPr>
+        <p:spPr>
+          <a:xfrm>
+            <a:off x="0" y="0"/>
+            <a:ext cx="3240000" cy="1800000"/>
+          </a:xfrm>
+          <a:prstGeom prst="rect">
+            <a:avLst/>
+          </a:prstGeom>
+          <a:solidFill>
+            <a:srgbClr val="FF8FB8"/>
+          </a:solidFill>
+          <a:ln>
+            <a:noFill/>
+          </a:ln>
+        </p:spPr>
+        <p:txBody>
+          <a:bodyPr rtlCol="0" anchor="ctr"/>
+          <a:lstStyle/>
+          <a:p>
+            <a:pPr algn="ctr"/>
+          </a:p>
+        </p:txBody>
+      </p:sp>
+      <p:sp>
+        <p:nvSpPr>
+          <p:cNvPr id="3" name="Rectangle 2"/>
+          <p:cNvSpPr/>
+          <p:nvPr/>
+        </p:nvSpPr>
+        <p:spPr>
+          <a:xfrm>
+            <a:off x="108000" y="108000"/>
+            <a:ext cx="3024000" cy="1584000"/>
+          </a:xfrm>
+          <a:prstGeom prst="rect">
+            <a:avLst/>
+          </a:prstGeom>
+          <a:noFill/>
+          <a:ln w="3600">
+            <a:solidFill>
+              <a:srgbClr val="12151C">
+                <a:alpha val="50000"/>
+              </a:srgbClr>
+            </a:solidFill>
+          </a:ln>
+        </p:spPr>
+        <p:txBody>
+          <a:bodyPr rtlCol="0" anchor="ctr"/>
+          <a:lstStyle/>
+          <a:p>
+            <a:pPr algn="ctr"/>
+          </a:p>
+        </p:txBody>
+      </p:sp>
+      <p:sp>
+        <p:nvSpPr>
+          <p:cNvPr id="4" name="텍스트"/>
           <p:cNvSpPr txBox="1"/>
           <p:nvPr/>
         </p:nvSpPr>
         <p:spPr>
           <a:xfrm>
-            <a:off x="216000" y="72000"/>
-            <a:ext cx="1080000" cy="936000"/>
+            <a:off x="288000" y="280800"/>
+            <a:ext cx="1440000" cy="99061"/>
           </a:xfrm>
           <a:prstGeom prst="rect">
             <a:avLst/>
@@ -3559,32 +4241,32 @@
           <a:p>
             <a:pPr algn="l">
               <a:lnSpc>
-                <a:spcPts val="15950"/>
+                <a:spcPts val="754"/>
               </a:lnSpc>
             </a:pPr>
             <a:r>
-              <a:rPr sz="11000" b="1">
+              <a:rPr sz="520" b="1" spc="240">
                 <a:solidFill>
-                  <a:srgbClr val="FF8FB8"/>
+                  <a:srgbClr val="12151C"/>
                 </a:solidFill>
                 <a:latin typeface="맑은 고딕"/>
                 <a:ea typeface="맑은 고딕"/>
               </a:rPr>
-              <a:t>“</a:t>
-            </a:r>
-          </a:p>
-        </p:txBody>
-      </p:sp>
-      <p:sp>
-        <p:nvSpPr>
-          <p:cNvPr id="3" name="텍스트"/>
+              <a:t>진료 · 상담</a:t>
+            </a:r>
+          </a:p>
+        </p:txBody>
+      </p:sp>
+      <p:sp>
+        <p:nvSpPr>
+          <p:cNvPr id="5" name="텍스트"/>
           <p:cNvSpPr txBox="1"/>
           <p:nvPr/>
         </p:nvSpPr>
         <p:spPr>
           <a:xfrm>
-            <a:off x="252000" y="792000"/>
-            <a:ext cx="2520000" cy="648000"/>
+            <a:off x="288000" y="468000"/>
+            <a:ext cx="1872000" cy="216000"/>
           </a:xfrm>
           <a:prstGeom prst="rect">
             <a:avLst/>
@@ -3599,53 +4281,53 @@
           <a:p>
             <a:pPr algn="l">
               <a:lnSpc>
-                <a:spcPts val="1812"/>
+                <a:spcPts val="1377"/>
               </a:lnSpc>
             </a:pPr>
             <a:r>
-              <a:rPr sz="1250" b="1">
+              <a:rPr sz="950" b="1">
                 <a:solidFill>
-                  <a:srgbClr val="FFFFFF"/>
+                  <a:srgbClr val="12151C"/>
                 </a:solidFill>
                 <a:latin typeface="맑은 고딕"/>
                 <a:ea typeface="맑은 고딕"/>
               </a:rPr>
-              <a:t>아이의 건강을 먼저 생각합니다</a:t>
+              <a:t>침 · 뜸</a:t>
             </a:r>
           </a:p>
         </p:txBody>
       </p:sp>
       <p:cxnSp>
         <p:nvCxnSpPr>
-          <p:cNvPr id="4" name="Connector 3"/>
+          <p:cNvPr id="6" name="Connector 5"/>
           <p:cNvCxnSpPr/>
           <p:nvPr/>
         </p:nvCxnSpPr>
         <p:spPr>
           <a:xfrm>
-            <a:off x="252000" y="1512000"/>
-            <a:ext cx="2736000" cy="0"/>
+            <a:off x="288000" y="669600"/>
+            <a:ext cx="1728000" cy="0"/>
           </a:xfrm>
           <a:prstGeom prst="line">
             <a:avLst/>
           </a:prstGeom>
-          <a:ln w="5760">
+          <a:ln w="3600">
             <a:solidFill>
-              <a:srgbClr val="2A2F38"/>
+              <a:srgbClr val="12151C"/>
             </a:solidFill>
           </a:ln>
         </p:spPr>
       </p:cxnSp>
       <p:sp>
         <p:nvSpPr>
-          <p:cNvPr id="5" name="텍스트"/>
+          <p:cNvPr id="7" name="텍스트"/>
           <p:cNvSpPr txBox="1"/>
           <p:nvPr/>
         </p:nvSpPr>
         <p:spPr>
           <a:xfrm>
-            <a:off x="252000" y="1569600"/>
-            <a:ext cx="2736000" cy="123826"/>
+            <a:off x="288000" y="691200"/>
+            <a:ext cx="1872000" cy="216000"/>
           </a:xfrm>
           <a:prstGeom prst="rect">
             <a:avLst/>
@@ -3658,15 +4340,362 @@
           </a:bodyPr>
           <a:lstStyle/>
           <a:p>
-            <a:pPr algn="r">
+            <a:pPr algn="l">
+              <a:lnSpc>
+                <a:spcPts val="1377"/>
+              </a:lnSpc>
+            </a:pPr>
+            <a:r>
+              <a:rPr sz="950" b="1">
+                <a:solidFill>
+                  <a:srgbClr val="12151C"/>
+                </a:solidFill>
+                <a:latin typeface="맑은 고딕"/>
+                <a:ea typeface="맑은 고딕"/>
+              </a:rPr>
+              <a:t>조제</a:t>
+            </a:r>
+          </a:p>
+        </p:txBody>
+      </p:sp>
+      <p:cxnSp>
+        <p:nvCxnSpPr>
+          <p:cNvPr id="8" name="Connector 7"/>
+          <p:cNvCxnSpPr/>
+          <p:nvPr/>
+        </p:nvCxnSpPr>
+        <p:spPr>
+          <a:xfrm>
+            <a:off x="288000" y="892800"/>
+            <a:ext cx="1728000" cy="0"/>
+          </a:xfrm>
+          <a:prstGeom prst="line">
+            <a:avLst/>
+          </a:prstGeom>
+          <a:ln w="3600">
+            <a:solidFill>
+              <a:srgbClr val="12151C"/>
+            </a:solidFill>
+          </a:ln>
+        </p:spPr>
+      </p:cxnSp>
+      <p:sp>
+        <p:nvSpPr>
+          <p:cNvPr id="9" name="텍스트"/>
+          <p:cNvSpPr txBox="1"/>
+          <p:nvPr/>
+        </p:nvSpPr>
+        <p:spPr>
+          <a:xfrm>
+            <a:off x="288000" y="914400"/>
+            <a:ext cx="1872000" cy="216000"/>
+          </a:xfrm>
+          <a:prstGeom prst="rect">
+            <a:avLst/>
+          </a:prstGeom>
+          <a:noFill/>
+        </p:spPr>
+        <p:txBody>
+          <a:bodyPr wrap="square" lIns="0" rIns="0" tIns="0" bIns="0" anchor="t">
+            <a:spAutoFit/>
+          </a:bodyPr>
+          <a:lstStyle/>
+          <a:p>
+            <a:pPr algn="l">
+              <a:lnSpc>
+                <a:spcPts val="1377"/>
+              </a:lnSpc>
+            </a:pPr>
+            <a:r>
+              <a:rPr sz="950" b="1">
+                <a:solidFill>
+                  <a:srgbClr val="12151C"/>
+                </a:solidFill>
+                <a:latin typeface="맑은 고딕"/>
+                <a:ea typeface="맑은 고딕"/>
+              </a:rPr>
+              <a:t>물리 치료</a:t>
+            </a:r>
+          </a:p>
+        </p:txBody>
+      </p:sp>
+      <p:cxnSp>
+        <p:nvCxnSpPr>
+          <p:cNvPr id="10" name="Connector 9"/>
+          <p:cNvCxnSpPr/>
+          <p:nvPr/>
+        </p:nvCxnSpPr>
+        <p:spPr>
+          <a:xfrm>
+            <a:off x="288000" y="1116000"/>
+            <a:ext cx="1728000" cy="0"/>
+          </a:xfrm>
+          <a:prstGeom prst="line">
+            <a:avLst/>
+          </a:prstGeom>
+          <a:ln w="3600">
+            <a:solidFill>
+              <a:srgbClr val="12151C"/>
+            </a:solidFill>
+          </a:ln>
+        </p:spPr>
+      </p:cxnSp>
+      <p:sp>
+        <p:nvSpPr>
+          <p:cNvPr id="11" name="텍스트"/>
+          <p:cNvSpPr txBox="1"/>
+          <p:nvPr/>
+        </p:nvSpPr>
+        <p:spPr>
+          <a:xfrm>
+            <a:off x="288000" y="1137600"/>
+            <a:ext cx="1872000" cy="216000"/>
+          </a:xfrm>
+          <a:prstGeom prst="rect">
+            <a:avLst/>
+          </a:prstGeom>
+          <a:noFill/>
+        </p:spPr>
+        <p:txBody>
+          <a:bodyPr wrap="square" lIns="0" rIns="0" tIns="0" bIns="0" anchor="t">
+            <a:spAutoFit/>
+          </a:bodyPr>
+          <a:lstStyle/>
+          <a:p>
+            <a:pPr algn="l">
+              <a:lnSpc>
+                <a:spcPts val="1377"/>
+              </a:lnSpc>
+            </a:pPr>
+            <a:r>
+              <a:rPr sz="950" b="1">
+                <a:solidFill>
+                  <a:srgbClr val="12151C"/>
+                </a:solidFill>
+                <a:latin typeface="맑은 고딕"/>
+                <a:ea typeface="맑은 고딕"/>
+              </a:rPr>
+              <a:t>영양 상담</a:t>
+            </a:r>
+          </a:p>
+        </p:txBody>
+      </p:sp>
+      <p:cxnSp>
+        <p:nvCxnSpPr>
+          <p:cNvPr id="12" name="Connector 11"/>
+          <p:cNvCxnSpPr/>
+          <p:nvPr/>
+        </p:nvCxnSpPr>
+        <p:spPr>
+          <a:xfrm>
+            <a:off x="288000" y="1339200"/>
+            <a:ext cx="1728000" cy="0"/>
+          </a:xfrm>
+          <a:prstGeom prst="line">
+            <a:avLst/>
+          </a:prstGeom>
+          <a:ln w="3600">
+            <a:solidFill>
+              <a:srgbClr val="12151C"/>
+            </a:solidFill>
+          </a:ln>
+        </p:spPr>
+      </p:cxnSp>
+      <p:sp>
+        <p:nvSpPr>
+          <p:cNvPr id="13" name="텍스트"/>
+          <p:cNvSpPr txBox="1"/>
+          <p:nvPr/>
+        </p:nvSpPr>
+        <p:spPr>
+          <a:xfrm>
+            <a:off x="2268000" y="468000"/>
+            <a:ext cx="864000" cy="91441"/>
+          </a:xfrm>
+          <a:prstGeom prst="rect">
+            <a:avLst/>
+          </a:prstGeom>
+          <a:noFill/>
+        </p:spPr>
+        <p:txBody>
+          <a:bodyPr wrap="square" lIns="0" rIns="0" tIns="0" bIns="0" anchor="t">
+            <a:spAutoFit/>
+          </a:bodyPr>
+          <a:lstStyle/>
+          <a:p>
+            <a:pPr algn="l">
+              <a:lnSpc>
+                <a:spcPts val="696"/>
+              </a:lnSpc>
+            </a:pPr>
+            <a:r>
+              <a:rPr sz="480" b="1" spc="140">
+                <a:solidFill>
+                  <a:srgbClr val="12151C">
+                    <a:alpha val="75000"/>
+                  </a:srgbClr>
+                </a:solidFill>
+                <a:latin typeface="맑은 고딕"/>
+                <a:ea typeface="맑은 고딕"/>
+              </a:rPr>
+              <a:t>HOURS</a:t>
+            </a:r>
+          </a:p>
+        </p:txBody>
+      </p:sp>
+      <p:sp>
+        <p:nvSpPr>
+          <p:cNvPr id="14" name="텍스트"/>
+          <p:cNvSpPr txBox="1"/>
+          <p:nvPr/>
+        </p:nvSpPr>
+        <p:spPr>
+          <a:xfrm>
+            <a:off x="2268000" y="576000"/>
+            <a:ext cx="864000" cy="118111"/>
+          </a:xfrm>
+          <a:prstGeom prst="rect">
+            <a:avLst/>
+          </a:prstGeom>
+          <a:noFill/>
+        </p:spPr>
+        <p:txBody>
+          <a:bodyPr wrap="square" lIns="0" rIns="0" tIns="0" bIns="0" anchor="t">
+            <a:spAutoFit/>
+          </a:bodyPr>
+          <a:lstStyle/>
+          <a:p>
+            <a:pPr algn="l">
+              <a:lnSpc>
+                <a:spcPts val="899"/>
+              </a:lnSpc>
+            </a:pPr>
+            <a:r>
+              <a:rPr sz="620" b="1">
+                <a:solidFill>
+                  <a:srgbClr val="12151C"/>
+                </a:solidFill>
+                <a:latin typeface="맑은 고딕"/>
+                <a:ea typeface="맑은 고딕"/>
+              </a:rPr>
+              <a:t>토 09:00 – 13:00</a:t>
+            </a:r>
+          </a:p>
+        </p:txBody>
+      </p:sp>
+      <p:sp>
+        <p:nvSpPr>
+          <p:cNvPr id="15" name="텍스트"/>
+          <p:cNvSpPr txBox="1"/>
+          <p:nvPr/>
+        </p:nvSpPr>
+        <p:spPr>
+          <a:xfrm>
+            <a:off x="2268000" y="900000"/>
+            <a:ext cx="864000" cy="91441"/>
+          </a:xfrm>
+          <a:prstGeom prst="rect">
+            <a:avLst/>
+          </a:prstGeom>
+          <a:noFill/>
+        </p:spPr>
+        <p:txBody>
+          <a:bodyPr wrap="square" lIns="0" rIns="0" tIns="0" bIns="0" anchor="t">
+            <a:spAutoFit/>
+          </a:bodyPr>
+          <a:lstStyle/>
+          <a:p>
+            <a:pPr algn="l">
+              <a:lnSpc>
+                <a:spcPts val="696"/>
+              </a:lnSpc>
+            </a:pPr>
+            <a:r>
+              <a:rPr sz="480" b="1" spc="140">
+                <a:solidFill>
+                  <a:srgbClr val="12151C">
+                    <a:alpha val="75000"/>
+                  </a:srgbClr>
+                </a:solidFill>
+                <a:latin typeface="맑은 고딕"/>
+                <a:ea typeface="맑은 고딕"/>
+              </a:rPr>
+              <a:t>WEB</a:t>
+            </a:r>
+          </a:p>
+        </p:txBody>
+      </p:sp>
+      <p:sp>
+        <p:nvSpPr>
+          <p:cNvPr id="16" name="텍스트"/>
+          <p:cNvSpPr txBox="1"/>
+          <p:nvPr/>
+        </p:nvSpPr>
+        <p:spPr>
+          <a:xfrm>
+            <a:off x="2268000" y="1008000"/>
+            <a:ext cx="864000" cy="118111"/>
+          </a:xfrm>
+          <a:prstGeom prst="rect">
+            <a:avLst/>
+          </a:prstGeom>
+          <a:noFill/>
+        </p:spPr>
+        <p:txBody>
+          <a:bodyPr wrap="square" lIns="0" rIns="0" tIns="0" bIns="0" anchor="t">
+            <a:spAutoFit/>
+          </a:bodyPr>
+          <a:lstStyle/>
+          <a:p>
+            <a:pPr algn="l">
+              <a:lnSpc>
+                <a:spcPts val="899"/>
+              </a:lnSpc>
+            </a:pPr>
+            <a:r>
+              <a:rPr sz="620" b="1">
+                <a:solidFill>
+                  <a:srgbClr val="12151C"/>
+                </a:solidFill>
+                <a:latin typeface="맑은 고딕"/>
+                <a:ea typeface="맑은 고딕"/>
+              </a:rPr>
+              <a:t>www.example.com</a:t>
+            </a:r>
+          </a:p>
+        </p:txBody>
+      </p:sp>
+      <p:sp>
+        <p:nvSpPr>
+          <p:cNvPr id="17" name="텍스트"/>
+          <p:cNvSpPr txBox="1"/>
+          <p:nvPr/>
+        </p:nvSpPr>
+        <p:spPr>
+          <a:xfrm>
+            <a:off x="288000" y="1512000"/>
+            <a:ext cx="1800000" cy="123826"/>
+          </a:xfrm>
+          <a:prstGeom prst="rect">
+            <a:avLst/>
+          </a:prstGeom>
+          <a:noFill/>
+        </p:spPr>
+        <p:txBody>
+          <a:bodyPr wrap="square" lIns="0" rIns="0" tIns="0" bIns="0" anchor="t">
+            <a:spAutoFit/>
+          </a:bodyPr>
+          <a:lstStyle/>
+          <a:p>
+            <a:pPr algn="l">
               <a:lnSpc>
                 <a:spcPts val="942"/>
               </a:lnSpc>
             </a:pPr>
             <a:r>
-              <a:rPr sz="650" b="1" spc="200">
+              <a:rPr sz="650" b="1" spc="220">
                 <a:solidFill>
-                  <a:srgbClr val="A3A9B5"/>
+                  <a:srgbClr val="12151C"/>
                 </a:solidFill>
                 <a:latin typeface="맑은 고딕"/>
                 <a:ea typeface="맑은 고딕"/>
